--- a/group_2_presentation.pptx
+++ b/group_2_presentation.pptx
@@ -123,6 +123,7 @@
     <p1510:client id="{1769B344-BE14-8A4A-97F1-D6F8F27318F9}" v="991" dt="2026-05-06T17:58:23.438"/>
     <p1510:client id="{5B14B9B6-DDD4-664E-13B6-BDDB08C22D43}" v="1920" dt="2026-05-06T17:46:42.450"/>
     <p1510:client id="{701AE3A3-CBF4-2944-8505-39DAFFF11F74}" v="68" dt="2026-05-05T22:38:45.183"/>
+    <p1510:client id="{DEC16207-9407-D34C-D908-D021438D9F46}" v="116" dt="2026-05-06T18:39:13.279"/>
   </p1510:revLst>
 </p1510:revInfo>
 </file>
@@ -226,6 +227,30 @@
             <pc:docMk/>
             <pc:sldMk cId="1708776046" sldId="266"/>
             <ac:spMk id="3" creationId="{75508300-42EC-FFC4-9480-8090D5C05665}"/>
+          </ac:spMkLst>
+        </pc:spChg>
+      </pc:sldChg>
+    </pc:docChg>
+  </pc:docChgLst>
+  <pc:docChgLst>
+    <pc:chgData name="Mcmullen, Connor" userId="S::cwm052@shsu.edu::79641c1f-6a4e-4bf2-8e09-7501aa24389b" providerId="AD" clId="Web-{DEC16207-9407-D34C-D908-D021438D9F46}"/>
+    <pc:docChg chg="modSld">
+      <pc:chgData name="Mcmullen, Connor" userId="S::cwm052@shsu.edu::79641c1f-6a4e-4bf2-8e09-7501aa24389b" providerId="AD" clId="Web-{DEC16207-9407-D34C-D908-D021438D9F46}" dt="2026-05-06T18:39:13.279" v="116" actId="20577"/>
+      <pc:docMkLst>
+        <pc:docMk/>
+      </pc:docMkLst>
+      <pc:sldChg chg="modSp">
+        <pc:chgData name="Mcmullen, Connor" userId="S::cwm052@shsu.edu::79641c1f-6a4e-4bf2-8e09-7501aa24389b" providerId="AD" clId="Web-{DEC16207-9407-D34C-D908-D021438D9F46}" dt="2026-05-06T18:39:13.279" v="116" actId="20577"/>
+        <pc:sldMkLst>
+          <pc:docMk/>
+          <pc:sldMk cId="923914608" sldId="267"/>
+        </pc:sldMkLst>
+        <pc:spChg chg="mod">
+          <ac:chgData name="Mcmullen, Connor" userId="S::cwm052@shsu.edu::79641c1f-6a4e-4bf2-8e09-7501aa24389b" providerId="AD" clId="Web-{DEC16207-9407-D34C-D908-D021438D9F46}" dt="2026-05-06T18:39:13.279" v="116" actId="20577"/>
+          <ac:spMkLst>
+            <pc:docMk/>
+            <pc:sldMk cId="923914608" sldId="267"/>
+            <ac:spMk id="3" creationId="{2124E90F-6DFD-9344-F0AB-91EE3A80741F}"/>
           </ac:spMkLst>
         </pc:spChg>
       </pc:sldChg>
@@ -4519,7 +4544,7 @@
         <p:spPr/>
         <p:txBody>
           <a:bodyPr vert="horz" lIns="91440" tIns="45720" rIns="91440" bIns="45720" rtlCol="0" anchor="t">
-            <a:normAutofit/>
+            <a:normAutofit lnSpcReduction="10000"/>
           </a:bodyPr>
           <a:lstStyle/>
           <a:p>
@@ -4531,7 +4556,7 @@
           <a:p>
             <a:r>
               <a:rPr lang="en-US"/>
-              <a:t> Hurricane Katrina displaced 134,458 people for a total decline of 54.13% between 2005 and 2006. Though recovery has occurred, only 86% of its population pre Katrina. The </a:t>
+              <a:t> Hurricane Katrina displaced 134,458 people for a total decline of 54.13% between 2005 and 2006. Though recovery has occurred, as of 2015 Orleans Parish has only recovered 86% of the pre Katrina population. The </a:t>
             </a:r>
             <a:r>
               <a:rPr lang="en-US" err="1"/>
